--- a/labs/lab-06-reporting-skill/data/checkpoints/Lumina_Initial_Update_Checkpoint.pptx
+++ b/labs/lab-06-reporting-skill/data/checkpoints/Lumina_Initial_Update_Checkpoint.pptx
@@ -4003,7 +4003,7 @@
               <a:defRPr sz="1000"/>
             </a:pPr>
             <a:r>
-              <a:t>TGS-2024043856 v9.1 | Synthetic Lumina example | 2026-09-30 | All filters All | Slide1</a:t>
+              <a:t>TGS-2024043856 v9.2 | Synthetic Lumina example | 2026-09-30 | All filters All | Slide1</a:t>
             </a:r>
           </a:p>
         </p:txBody>
@@ -4136,7 +4136,7 @@
               <a:defRPr sz="1000"/>
             </a:pPr>
             <a:r>
-              <a:t>TGS-2024043856 v9.1 | Synthetic Lumina example | 2026-09-30 | All filters All | Slide2</a:t>
+              <a:t>TGS-2024043856 v9.2 | Synthetic Lumina example | 2026-09-30 | All filters All | Slide2</a:t>
             </a:r>
           </a:p>
         </p:txBody>
@@ -4286,7 +4286,7 @@
               <a:defRPr sz="1000"/>
             </a:pPr>
             <a:r>
-              <a:t>TGS-2024043856 v9.1 | Synthetic Lumina example | 2026-09-30 | All filters All | Slide3</a:t>
+              <a:t>TGS-2024043856 v9.2 | Synthetic Lumina example | 2026-09-30 | All filters All | Slide3</a:t>
             </a:r>
           </a:p>
         </p:txBody>
@@ -4436,7 +4436,7 @@
               <a:defRPr sz="1000"/>
             </a:pPr>
             <a:r>
-              <a:t>TGS-2024043856 v9.1 | Synthetic Lumina example | 2026-09-30 | All filters All | Slide4</a:t>
+              <a:t>TGS-2024043856 v9.2 | Synthetic Lumina example | 2026-09-30 | All filters All | Slide4</a:t>
             </a:r>
           </a:p>
         </p:txBody>

--- a/labs/lab-06-reporting-skill/data/checkpoints/Lumina_Initial_Update_Checkpoint.pptx
+++ b/labs/lab-06-reporting-skill/data/checkpoints/Lumina_Initial_Update_Checkpoint.pptx
@@ -4003,7 +4003,7 @@
               <a:defRPr sz="1000"/>
             </a:pPr>
             <a:r>
-              <a:t>TGS-2024043856 v9.2 | Synthetic Lumina example | 2026-09-30 | All filters All | Slide1</a:t>
+              <a:t>TGS-2024043856 v9.3 | Synthetic Lumina example | 2026-09-30 | All filters All | Slide1</a:t>
             </a:r>
           </a:p>
         </p:txBody>
@@ -4136,7 +4136,7 @@
               <a:defRPr sz="1000"/>
             </a:pPr>
             <a:r>
-              <a:t>TGS-2024043856 v9.2 | Synthetic Lumina example | 2026-09-30 | All filters All | Slide2</a:t>
+              <a:t>TGS-2024043856 v9.3 | Synthetic Lumina example | 2026-09-30 | All filters All | Slide2</a:t>
             </a:r>
           </a:p>
         </p:txBody>
@@ -4286,7 +4286,7 @@
               <a:defRPr sz="1000"/>
             </a:pPr>
             <a:r>
-              <a:t>TGS-2024043856 v9.2 | Synthetic Lumina example | 2026-09-30 | All filters All | Slide3</a:t>
+              <a:t>TGS-2024043856 v9.3 | Synthetic Lumina example | 2026-09-30 | All filters All | Slide3</a:t>
             </a:r>
           </a:p>
         </p:txBody>
@@ -4436,7 +4436,7 @@
               <a:defRPr sz="1000"/>
             </a:pPr>
             <a:r>
-              <a:t>TGS-2024043856 v9.2 | Synthetic Lumina example | 2026-09-30 | All filters All | Slide4</a:t>
+              <a:t>TGS-2024043856 v9.3 | Synthetic Lumina example | 2026-09-30 | All filters All | Slide4</a:t>
             </a:r>
           </a:p>
         </p:txBody>

--- a/labs/lab-06-reporting-skill/data/checkpoints/Lumina_Initial_Update_Checkpoint.pptx
+++ b/labs/lab-06-reporting-skill/data/checkpoints/Lumina_Initial_Update_Checkpoint.pptx
@@ -4003,7 +4003,7 @@
               <a:defRPr sz="1000"/>
             </a:pPr>
             <a:r>
-              <a:t>TGS-2024043856 v9.3 | Synthetic Lumina example | 2026-09-30 | All filters All | Slide1</a:t>
+              <a:t>TGS-2024043856 v9.4 | Synthetic Lumina example | 2026-09-30 | All filters All | Slide1</a:t>
             </a:r>
           </a:p>
         </p:txBody>
@@ -4136,7 +4136,7 @@
               <a:defRPr sz="1000"/>
             </a:pPr>
             <a:r>
-              <a:t>TGS-2024043856 v9.3 | Synthetic Lumina example | 2026-09-30 | All filters All | Slide2</a:t>
+              <a:t>TGS-2024043856 v9.4 | Synthetic Lumina example | 2026-09-30 | All filters All | Slide2</a:t>
             </a:r>
           </a:p>
         </p:txBody>
@@ -4286,7 +4286,7 @@
               <a:defRPr sz="1000"/>
             </a:pPr>
             <a:r>
-              <a:t>TGS-2024043856 v9.3 | Synthetic Lumina example | 2026-09-30 | All filters All | Slide3</a:t>
+              <a:t>TGS-2024043856 v9.4 | Synthetic Lumina example | 2026-09-30 | All filters All | Slide3</a:t>
             </a:r>
           </a:p>
         </p:txBody>
@@ -4436,7 +4436,7 @@
               <a:defRPr sz="1000"/>
             </a:pPr>
             <a:r>
-              <a:t>TGS-2024043856 v9.3 | Synthetic Lumina example | 2026-09-30 | All filters All | Slide4</a:t>
+              <a:t>TGS-2024043856 v9.4 | Synthetic Lumina example | 2026-09-30 | All filters All | Slide4</a:t>
             </a:r>
           </a:p>
         </p:txBody>

--- a/labs/lab-06-reporting-skill/data/checkpoints/Lumina_Initial_Update_Checkpoint.pptx
+++ b/labs/lab-06-reporting-skill/data/checkpoints/Lumina_Initial_Update_Checkpoint.pptx
@@ -4003,7 +4003,7 @@
               <a:defRPr sz="1000"/>
             </a:pPr>
             <a:r>
-              <a:t>TGS-2024043856 v9.4 | Synthetic Lumina example | 2026-09-30 | All filters All | Slide1</a:t>
+              <a:t>TGS-2024043856 v9.5 | Synthetic Lumina example | 2026-09-30 | All filters All | Slide1</a:t>
             </a:r>
           </a:p>
         </p:txBody>
@@ -4136,7 +4136,7 @@
               <a:defRPr sz="1000"/>
             </a:pPr>
             <a:r>
-              <a:t>TGS-2024043856 v9.4 | Synthetic Lumina example | 2026-09-30 | All filters All | Slide2</a:t>
+              <a:t>TGS-2024043856 v9.5 | Synthetic Lumina example | 2026-09-30 | All filters All | Slide2</a:t>
             </a:r>
           </a:p>
         </p:txBody>
@@ -4286,7 +4286,7 @@
               <a:defRPr sz="1000"/>
             </a:pPr>
             <a:r>
-              <a:t>TGS-2024043856 v9.4 | Synthetic Lumina example | 2026-09-30 | All filters All | Slide3</a:t>
+              <a:t>TGS-2024043856 v9.5 | Synthetic Lumina example | 2026-09-30 | All filters All | Slide3</a:t>
             </a:r>
           </a:p>
         </p:txBody>
@@ -4436,7 +4436,7 @@
               <a:defRPr sz="1000"/>
             </a:pPr>
             <a:r>
-              <a:t>TGS-2024043856 v9.4 | Synthetic Lumina example | 2026-09-30 | All filters All | Slide4</a:t>
+              <a:t>TGS-2024043856 v9.5 | Synthetic Lumina example | 2026-09-30 | All filters All | Slide4</a:t>
             </a:r>
           </a:p>
         </p:txBody>
